--- a/morning-registration-activities/form-time-quiz/downloads/Form_Time_Quiz_Volume_Two_Sixth_Form.pptx
+++ b/morning-registration-activities/form-time-quiz/downloads/Form_Time_Quiz_Volume_Two_Sixth_Form.pptx
@@ -3193,7 +3193,7 @@
                 <a:solidFill>
                   <a:srgbClr val="2B6573"/>
                 </a:solidFill>
-                <a:latin typeface="Karla"/>
+                <a:latin typeface="Calibri"/>
               </a:rPr>
               <a:t>MORNING REGISTRATION ACTIVITIES</a:t>
             </a:r>
@@ -3231,11 +3231,11 @@
               </a:spcAft>
             </a:pPr>
             <a:r>
-              <a:rPr sz="3000" b="1" i="0">
+              <a:rPr sz="3000" b="0" i="0">
                 <a:solidFill>
                   <a:srgbClr val="2B6573"/>
                 </a:solidFill>
-                <a:latin typeface="Libre Caslon Display"/>
+                <a:latin typeface="Georgia"/>
               </a:rPr>
               <a:t>The Form Time Quiz</a:t>
             </a:r>
@@ -3290,7 +3290,7 @@
                 <a:solidFill>
                   <a:srgbClr val="FFFDF7"/>
                 </a:solidFill>
-                <a:latin typeface="Karla"/>
+                <a:latin typeface="Calibri"/>
               </a:rPr>
               <a:t>VOLUME TWO  ·  SIXTH FORM</a:t>
             </a:r>
@@ -3332,7 +3332,7 @@
                 <a:solidFill>
                   <a:srgbClr val="5C6552"/>
                 </a:solidFill>
-                <a:latin typeface="Karla"/>
+                <a:latin typeface="Calibri"/>
               </a:rPr>
               <a:t>Ten questions: six on thinking traps, then four of general knowledge.</a:t>
             </a:r>
@@ -3482,11 +3482,11 @@
               </a:spcAft>
             </a:pPr>
             <a:r>
-              <a:rPr sz="1350" b="1" i="0">
+              <a:rPr sz="1350" b="0" i="0">
                 <a:solidFill>
                   <a:srgbClr val="2B6573"/>
                 </a:solidFill>
-                <a:latin typeface="Libre Caslon Display"/>
+                <a:latin typeface="Georgia"/>
               </a:rPr>
               <a:t>Get into teams</a:t>
             </a:r>
@@ -3528,7 +3528,7 @@
                 <a:solidFill>
                   <a:srgbClr val="5C6552"/>
                 </a:solidFill>
-                <a:latin typeface="Karla"/>
+                <a:latin typeface="Calibri"/>
               </a:rPr>
               <a:t>Three or four to a team, with one answer sheet between you.</a:t>
             </a:r>
@@ -3678,11 +3678,11 @@
               </a:spcAft>
             </a:pPr>
             <a:r>
-              <a:rPr sz="1350" b="1" i="0">
+              <a:rPr sz="1350" b="0" i="0">
                 <a:solidFill>
                   <a:srgbClr val="2B6573"/>
                 </a:solidFill>
-                <a:latin typeface="Libre Caslon Display"/>
+                <a:latin typeface="Georgia"/>
               </a:rPr>
               <a:t>Answer together</a:t>
             </a:r>
@@ -3724,7 +3724,7 @@
                 <a:solidFill>
                   <a:srgbClr val="5C6552"/>
                 </a:solidFill>
-                <a:latin typeface="Karla"/>
+                <a:latin typeface="Calibri"/>
               </a:rPr>
               <a:t>Each question goes up on the board. Agree an answer, then write it down.</a:t>
             </a:r>
@@ -3874,11 +3874,11 @@
               </a:spcAft>
             </a:pPr>
             <a:r>
-              <a:rPr sz="1350" b="1" i="0">
+              <a:rPr sz="1350" b="0" i="0">
                 <a:solidFill>
                   <a:srgbClr val="2B6573"/>
                 </a:solidFill>
-                <a:latin typeface="Libre Caslon Display"/>
+                <a:latin typeface="Georgia"/>
               </a:rPr>
               <a:t>Swap and mark</a:t>
             </a:r>
@@ -3920,7 +3920,7 @@
                 <a:solidFill>
                   <a:srgbClr val="5C6552"/>
                 </a:solidFill>
-                <a:latin typeface="Karla"/>
+                <a:latin typeface="Calibri"/>
               </a:rPr>
               <a:t>Swap sheets with the team next to you, then the answers go up one at a time.</a:t>
             </a:r>
@@ -3962,7 +3962,7 @@
                 <a:solidFill>
                   <a:srgbClr val="8B9179"/>
                 </a:solidFill>
-                <a:latin typeface="Karla"/>
+                <a:latin typeface="Calibri"/>
               </a:rPr>
               <a:t>Needs: one answer sheet per team, from the resource pack.</a:t>
             </a:r>
@@ -4028,7 +4028,7 @@
                 <a:solidFill>
                   <a:srgbClr val="8B9179"/>
                 </a:solidFill>
-                <a:latin typeface="Karla"/>
+                <a:latin typeface="Calibri"/>
               </a:rPr>
               <a:t>The Pastoral Guide</a:t>
             </a:r>
@@ -4070,7 +4070,7 @@
                 <a:solidFill>
                   <a:srgbClr val="8B9179"/>
                 </a:solidFill>
-                <a:latin typeface="Karla"/>
+                <a:latin typeface="Calibri"/>
               </a:rPr>
               <a:t>1 / 27</a:t>
             </a:r>
@@ -4174,7 +4174,7 @@
                 <a:solidFill>
                   <a:srgbClr val="2B6573"/>
                 </a:solidFill>
-                <a:latin typeface="Karla"/>
+                <a:latin typeface="Calibri"/>
               </a:rPr>
               <a:t>THE FORM TIME QUIZ  ·  ROUND TWO  ·  QUESTION 7 OF 10</a:t>
             </a:r>
@@ -4350,7 +4350,7 @@
                 <a:solidFill>
                   <a:srgbClr val="FFFDF7"/>
                 </a:solidFill>
-                <a:latin typeface="Karla"/>
+                <a:latin typeface="Calibri"/>
               </a:rPr>
               <a:t>7</a:t>
             </a:r>
@@ -4388,11 +4388,11 @@
               </a:spcAft>
             </a:pPr>
             <a:r>
-              <a:rPr sz="2400" b="1" i="0">
+              <a:rPr sz="2400" b="0" i="0">
                 <a:solidFill>
                   <a:srgbClr val="2B6573"/>
                 </a:solidFill>
-                <a:latin typeface="Libre Caslon Display"/>
+                <a:latin typeface="Georgia"/>
               </a:rPr>
               <a:t>Which country’s national flag is made of two triangles, one on top of the other?</a:t>
             </a:r>
@@ -4478,7 +4478,7 @@
                 <a:solidFill>
                   <a:srgbClr val="8B9179"/>
                 </a:solidFill>
-                <a:latin typeface="Karla"/>
+                <a:latin typeface="Calibri"/>
               </a:rPr>
               <a:t>Agree it as a team, then write it on the sheet.</a:t>
             </a:r>
@@ -4544,7 +4544,7 @@
                 <a:solidFill>
                   <a:srgbClr val="8B9179"/>
                 </a:solidFill>
-                <a:latin typeface="Karla"/>
+                <a:latin typeface="Calibri"/>
               </a:rPr>
               <a:t>The Pastoral Guide</a:t>
             </a:r>
@@ -4586,7 +4586,7 @@
                 <a:solidFill>
                   <a:srgbClr val="8B9179"/>
                 </a:solidFill>
-                <a:latin typeface="Karla"/>
+                <a:latin typeface="Calibri"/>
               </a:rPr>
               <a:t>10 / 27</a:t>
             </a:r>
@@ -4690,7 +4690,7 @@
                 <a:solidFill>
                   <a:srgbClr val="2B6573"/>
                 </a:solidFill>
-                <a:latin typeface="Karla"/>
+                <a:latin typeface="Calibri"/>
               </a:rPr>
               <a:t>THE FORM TIME QUIZ  ·  ROUND TWO  ·  QUESTION 8 OF 10</a:t>
             </a:r>
@@ -4866,7 +4866,7 @@
                 <a:solidFill>
                   <a:srgbClr val="FFFDF7"/>
                 </a:solidFill>
-                <a:latin typeface="Karla"/>
+                <a:latin typeface="Calibri"/>
               </a:rPr>
               <a:t>8</a:t>
             </a:r>
@@ -4904,11 +4904,11 @@
               </a:spcAft>
             </a:pPr>
             <a:r>
-              <a:rPr sz="2400" b="1" i="0">
+              <a:rPr sz="2400" b="0" i="0">
                 <a:solidFill>
                   <a:srgbClr val="2B6573"/>
                 </a:solidFill>
-                <a:latin typeface="Libre Caslon Display"/>
+                <a:latin typeface="Georgia"/>
               </a:rPr>
               <a:t>What is the capital city of Turkey?</a:t>
             </a:r>
@@ -4950,7 +4950,7 @@
                 <a:solidFill>
                   <a:srgbClr val="8B9179"/>
                 </a:solidFill>
-                <a:latin typeface="Karla"/>
+                <a:latin typeface="Calibri"/>
               </a:rPr>
               <a:t>ONE OF THESE</a:t>
             </a:r>
@@ -5126,7 +5126,7 @@
                 <a:solidFill>
                   <a:srgbClr val="FFFDF7"/>
                 </a:solidFill>
-                <a:latin typeface="Karla"/>
+                <a:latin typeface="Calibri"/>
               </a:rPr>
               <a:t>A</a:t>
             </a:r>
@@ -5168,7 +5168,7 @@
                 <a:solidFill>
                   <a:srgbClr val="2E3436"/>
                 </a:solidFill>
-                <a:latin typeface="Karla"/>
+                <a:latin typeface="Calibri"/>
               </a:rPr>
               <a:t>Istanbul</a:t>
             </a:r>
@@ -5344,7 +5344,7 @@
                 <a:solidFill>
                   <a:srgbClr val="FFFDF7"/>
                 </a:solidFill>
-                <a:latin typeface="Karla"/>
+                <a:latin typeface="Calibri"/>
               </a:rPr>
               <a:t>B</a:t>
             </a:r>
@@ -5386,7 +5386,7 @@
                 <a:solidFill>
                   <a:srgbClr val="2E3436"/>
                 </a:solidFill>
-                <a:latin typeface="Karla"/>
+                <a:latin typeface="Calibri"/>
               </a:rPr>
               <a:t>Ankara</a:t>
             </a:r>
@@ -5562,7 +5562,7 @@
                 <a:solidFill>
                   <a:srgbClr val="FFFDF7"/>
                 </a:solidFill>
-                <a:latin typeface="Karla"/>
+                <a:latin typeface="Calibri"/>
               </a:rPr>
               <a:t>C</a:t>
             </a:r>
@@ -5604,7 +5604,7 @@
                 <a:solidFill>
                   <a:srgbClr val="2E3436"/>
                 </a:solidFill>
-                <a:latin typeface="Karla"/>
+                <a:latin typeface="Calibri"/>
               </a:rPr>
               <a:t>Izmir</a:t>
             </a:r>
@@ -5646,7 +5646,7 @@
                 <a:solidFill>
                   <a:srgbClr val="5C6552"/>
                 </a:solidFill>
-                <a:latin typeface="Karla"/>
+                <a:latin typeface="Calibri"/>
               </a:rPr>
               <a:t>Agree it as a team, then tick it on the sheet.</a:t>
             </a:r>
@@ -5712,7 +5712,7 @@
                 <a:solidFill>
                   <a:srgbClr val="8B9179"/>
                 </a:solidFill>
-                <a:latin typeface="Karla"/>
+                <a:latin typeface="Calibri"/>
               </a:rPr>
               <a:t>The Pastoral Guide</a:t>
             </a:r>
@@ -5754,7 +5754,7 @@
                 <a:solidFill>
                   <a:srgbClr val="8B9179"/>
                 </a:solidFill>
-                <a:latin typeface="Karla"/>
+                <a:latin typeface="Calibri"/>
               </a:rPr>
               <a:t>11 / 27</a:t>
             </a:r>
@@ -5858,7 +5858,7 @@
                 <a:solidFill>
                   <a:srgbClr val="2B6573"/>
                 </a:solidFill>
-                <a:latin typeface="Karla"/>
+                <a:latin typeface="Calibri"/>
               </a:rPr>
               <a:t>THE FORM TIME QUIZ  ·  ROUND TWO  ·  QUESTION 9 OF 10</a:t>
             </a:r>
@@ -6034,7 +6034,7 @@
                 <a:solidFill>
                   <a:srgbClr val="FFFDF7"/>
                 </a:solidFill>
-                <a:latin typeface="Karla"/>
+                <a:latin typeface="Calibri"/>
               </a:rPr>
               <a:t>9</a:t>
             </a:r>
@@ -6072,11 +6072,11 @@
               </a:spcAft>
             </a:pPr>
             <a:r>
-              <a:rPr sz="2400" b="1" i="0">
+              <a:rPr sz="2400" b="0" i="0">
                 <a:solidFill>
                   <a:srgbClr val="2B6573"/>
                 </a:solidFill>
-                <a:latin typeface="Libre Caslon Display"/>
+                <a:latin typeface="Georgia"/>
               </a:rPr>
               <a:t>Which element has the atomic number 1?</a:t>
             </a:r>
@@ -6162,7 +6162,7 @@
                 <a:solidFill>
                   <a:srgbClr val="8B9179"/>
                 </a:solidFill>
-                <a:latin typeface="Karla"/>
+                <a:latin typeface="Calibri"/>
               </a:rPr>
               <a:t>Agree it as a team, then write it on the sheet.</a:t>
             </a:r>
@@ -6228,7 +6228,7 @@
                 <a:solidFill>
                   <a:srgbClr val="8B9179"/>
                 </a:solidFill>
-                <a:latin typeface="Karla"/>
+                <a:latin typeface="Calibri"/>
               </a:rPr>
               <a:t>The Pastoral Guide</a:t>
             </a:r>
@@ -6270,7 +6270,7 @@
                 <a:solidFill>
                   <a:srgbClr val="8B9179"/>
                 </a:solidFill>
-                <a:latin typeface="Karla"/>
+                <a:latin typeface="Calibri"/>
               </a:rPr>
               <a:t>12 / 27</a:t>
             </a:r>
@@ -6374,7 +6374,7 @@
                 <a:solidFill>
                   <a:srgbClr val="2B6573"/>
                 </a:solidFill>
-                <a:latin typeface="Karla"/>
+                <a:latin typeface="Calibri"/>
               </a:rPr>
               <a:t>THE FORM TIME QUIZ  ·  ROUND TWO  ·  QUESTION 10 OF 10</a:t>
             </a:r>
@@ -6550,7 +6550,7 @@
                 <a:solidFill>
                   <a:srgbClr val="FFFDF7"/>
                 </a:solidFill>
-                <a:latin typeface="Karla"/>
+                <a:latin typeface="Calibri"/>
               </a:rPr>
               <a:t>10</a:t>
             </a:r>
@@ -6588,11 +6588,11 @@
               </a:spcAft>
             </a:pPr>
             <a:r>
-              <a:rPr sz="2400" b="1" i="0">
+              <a:rPr sz="2400" b="0" i="0">
                 <a:solidFill>
                   <a:srgbClr val="2B6573"/>
                 </a:solidFill>
-                <a:latin typeface="Libre Caslon Display"/>
+                <a:latin typeface="Georgia"/>
               </a:rPr>
               <a:t>What is the official language of Brazil?</a:t>
             </a:r>
@@ -6634,7 +6634,7 @@
                 <a:solidFill>
                   <a:srgbClr val="8B9179"/>
                 </a:solidFill>
-                <a:latin typeface="Karla"/>
+                <a:latin typeface="Calibri"/>
               </a:rPr>
               <a:t>ONE OF THESE</a:t>
             </a:r>
@@ -6810,7 +6810,7 @@
                 <a:solidFill>
                   <a:srgbClr val="FFFDF7"/>
                 </a:solidFill>
-                <a:latin typeface="Karla"/>
+                <a:latin typeface="Calibri"/>
               </a:rPr>
               <a:t>A</a:t>
             </a:r>
@@ -6852,7 +6852,7 @@
                 <a:solidFill>
                   <a:srgbClr val="2E3436"/>
                 </a:solidFill>
-                <a:latin typeface="Karla"/>
+                <a:latin typeface="Calibri"/>
               </a:rPr>
               <a:t>Spanish</a:t>
             </a:r>
@@ -7028,7 +7028,7 @@
                 <a:solidFill>
                   <a:srgbClr val="FFFDF7"/>
                 </a:solidFill>
-                <a:latin typeface="Karla"/>
+                <a:latin typeface="Calibri"/>
               </a:rPr>
               <a:t>B</a:t>
             </a:r>
@@ -7070,7 +7070,7 @@
                 <a:solidFill>
                   <a:srgbClr val="2E3436"/>
                 </a:solidFill>
-                <a:latin typeface="Karla"/>
+                <a:latin typeface="Calibri"/>
               </a:rPr>
               <a:t>Portuguese</a:t>
             </a:r>
@@ -7246,7 +7246,7 @@
                 <a:solidFill>
                   <a:srgbClr val="FFFDF7"/>
                 </a:solidFill>
-                <a:latin typeface="Karla"/>
+                <a:latin typeface="Calibri"/>
               </a:rPr>
               <a:t>C</a:t>
             </a:r>
@@ -7288,7 +7288,7 @@
                 <a:solidFill>
                   <a:srgbClr val="2E3436"/>
                 </a:solidFill>
-                <a:latin typeface="Karla"/>
+                <a:latin typeface="Calibri"/>
               </a:rPr>
               <a:t>French</a:t>
             </a:r>
@@ -7330,7 +7330,7 @@
                 <a:solidFill>
                   <a:srgbClr val="5C6552"/>
                 </a:solidFill>
-                <a:latin typeface="Karla"/>
+                <a:latin typeface="Calibri"/>
               </a:rPr>
               <a:t>Agree it as a team, then tick it on the sheet.</a:t>
             </a:r>
@@ -7396,7 +7396,7 @@
                 <a:solidFill>
                   <a:srgbClr val="8B9179"/>
                 </a:solidFill>
-                <a:latin typeface="Karla"/>
+                <a:latin typeface="Calibri"/>
               </a:rPr>
               <a:t>The Pastoral Guide</a:t>
             </a:r>
@@ -7438,7 +7438,7 @@
                 <a:solidFill>
                   <a:srgbClr val="8B9179"/>
                 </a:solidFill>
-                <a:latin typeface="Karla"/>
+                <a:latin typeface="Calibri"/>
               </a:rPr>
               <a:t>13 / 27</a:t>
             </a:r>
@@ -7555,7 +7555,7 @@
                 <a:solidFill>
                   <a:srgbClr val="2B6573"/>
                 </a:solidFill>
-                <a:latin typeface="Karla"/>
+                <a:latin typeface="Calibri"/>
               </a:rPr>
               <a:t>ANSWERS</a:t>
             </a:r>
@@ -7593,11 +7593,11 @@
               </a:spcAft>
             </a:pPr>
             <a:r>
-              <a:rPr sz="4000" b="1" i="0">
+              <a:rPr sz="4000" b="0" i="0">
                 <a:solidFill>
                   <a:srgbClr val="FFFDF7"/>
                 </a:solidFill>
-                <a:latin typeface="Libre Caslon Display"/>
+                <a:latin typeface="Georgia"/>
               </a:rPr>
               <a:t>Swap sheets</a:t>
             </a:r>
@@ -7683,7 +7683,7 @@
                 <a:solidFill>
                   <a:srgbClr val="C4DCE1"/>
                 </a:solidFill>
-                <a:latin typeface="Karla"/>
+                <a:latin typeface="Calibri"/>
               </a:rPr>
               <a:t>Swap with the team next to you. Give one mark for each right answer, then add up the score out of ten.</a:t>
             </a:r>
@@ -7749,7 +7749,7 @@
                 <a:solidFill>
                   <a:srgbClr val="C4DCE1"/>
                 </a:solidFill>
-                <a:latin typeface="Karla"/>
+                <a:latin typeface="Calibri"/>
               </a:rPr>
               <a:t>The Pastoral Guide</a:t>
             </a:r>
@@ -7791,7 +7791,7 @@
                 <a:solidFill>
                   <a:srgbClr val="C4DCE1"/>
                 </a:solidFill>
-                <a:latin typeface="Karla"/>
+                <a:latin typeface="Calibri"/>
               </a:rPr>
               <a:t>14 / 27</a:t>
             </a:r>
@@ -7895,7 +7895,7 @@
                 <a:solidFill>
                   <a:srgbClr val="2B6573"/>
                 </a:solidFill>
-                <a:latin typeface="Karla"/>
+                <a:latin typeface="Calibri"/>
               </a:rPr>
               <a:t>THE FORM TIME QUIZ  ·  ANSWERS  ·  QUESTION 1</a:t>
             </a:r>
@@ -7937,7 +7937,7 @@
                 <a:solidFill>
                   <a:srgbClr val="5C6552"/>
                 </a:solidFill>
-                <a:latin typeface="Karla"/>
+                <a:latin typeface="Calibri"/>
               </a:rPr>
               <a:t>After seeing a random 65, people guessed a higher share of UN countries were in Africa. What is this trap called?</a:t>
             </a:r>
@@ -7975,11 +7975,11 @@
               </a:spcAft>
             </a:pPr>
             <a:r>
-              <a:rPr sz="3400" b="1" i="0">
+              <a:rPr sz="3400" b="0" i="0">
                 <a:solidFill>
                   <a:srgbClr val="2B6573"/>
                 </a:solidFill>
-                <a:latin typeface="Libre Caslon Display"/>
+                <a:latin typeface="Georgia"/>
               </a:rPr>
               <a:t>Anchoring</a:t>
             </a:r>
@@ -8111,7 +8111,7 @@
                 <a:solidFill>
                   <a:srgbClr val="2E3436"/>
                 </a:solidFill>
-                <a:latin typeface="Karla"/>
+                <a:latin typeface="Calibri"/>
               </a:rPr>
               <a:t>The number came from a spinning wheel and meant nothing, but it still pulled guesses towards it: a typical guess was 45% after seeing 65, and 25% after seeing 10.</a:t>
             </a:r>
@@ -8177,7 +8177,7 @@
                 <a:solidFill>
                   <a:srgbClr val="8B9179"/>
                 </a:solidFill>
-                <a:latin typeface="Karla"/>
+                <a:latin typeface="Calibri"/>
               </a:rPr>
               <a:t>The Pastoral Guide</a:t>
             </a:r>
@@ -8219,7 +8219,7 @@
                 <a:solidFill>
                   <a:srgbClr val="8B9179"/>
                 </a:solidFill>
-                <a:latin typeface="Karla"/>
+                <a:latin typeface="Calibri"/>
               </a:rPr>
               <a:t>15 / 27</a:t>
             </a:r>
@@ -8261,7 +8261,7 @@
                 <a:solidFill>
                   <a:srgbClr val="8B9179"/>
                 </a:solidFill>
-                <a:latin typeface="Karla"/>
+                <a:latin typeface="Calibri"/>
               </a:rPr>
               <a:t>Source: Tversky and Kahneman, Science, 1974</a:t>
             </a:r>
@@ -8365,7 +8365,7 @@
                 <a:solidFill>
                   <a:srgbClr val="2B6573"/>
                 </a:solidFill>
-                <a:latin typeface="Karla"/>
+                <a:latin typeface="Calibri"/>
               </a:rPr>
               <a:t>THE FORM TIME QUIZ  ·  ANSWERS  ·  QUESTION 2</a:t>
             </a:r>
@@ -8407,7 +8407,7 @@
                 <a:solidFill>
                   <a:srgbClr val="5C6552"/>
                 </a:solidFill>
-                <a:latin typeface="Karla"/>
+                <a:latin typeface="Calibri"/>
               </a:rPr>
               <a:t>In a 1985 study, most people chose a ski trip they said they would enjoy less, because it had cost more.</a:t>
             </a:r>
@@ -8445,11 +8445,11 @@
               </a:spcAft>
             </a:pPr>
             <a:r>
-              <a:rPr sz="3400" b="1" i="0">
+              <a:rPr sz="3400" b="0" i="0">
                 <a:solidFill>
                   <a:srgbClr val="2B6573"/>
                 </a:solidFill>
-                <a:latin typeface="Libre Caslon Display"/>
+                <a:latin typeface="Georgia"/>
               </a:rPr>
               <a:t>Fact</a:t>
             </a:r>
@@ -8581,7 +8581,7 @@
                 <a:solidFill>
                   <a:srgbClr val="2E3436"/>
                 </a:solidFill>
-                <a:latin typeface="Karla"/>
+                <a:latin typeface="Calibri"/>
               </a:rPr>
               <a:t>33 of 61 people picked the $100 trip over the $50 one they preferred, because they did not want to waste money already spent. This is the sunk cost trap.</a:t>
             </a:r>
@@ -8647,7 +8647,7 @@
                 <a:solidFill>
                   <a:srgbClr val="8B9179"/>
                 </a:solidFill>
-                <a:latin typeface="Karla"/>
+                <a:latin typeface="Calibri"/>
               </a:rPr>
               <a:t>The Pastoral Guide</a:t>
             </a:r>
@@ -8689,7 +8689,7 @@
                 <a:solidFill>
                   <a:srgbClr val="8B9179"/>
                 </a:solidFill>
-                <a:latin typeface="Karla"/>
+                <a:latin typeface="Calibri"/>
               </a:rPr>
               <a:t>16 / 27</a:t>
             </a:r>
@@ -8731,7 +8731,7 @@
                 <a:solidFill>
                   <a:srgbClr val="8B9179"/>
                 </a:solidFill>
-                <a:latin typeface="Karla"/>
+                <a:latin typeface="Calibri"/>
               </a:rPr>
               <a:t>Source: Arkes and Blumer, 1985</a:t>
             </a:r>
@@ -8835,7 +8835,7 @@
                 <a:solidFill>
                   <a:srgbClr val="2B6573"/>
                 </a:solidFill>
-                <a:latin typeface="Karla"/>
+                <a:latin typeface="Calibri"/>
               </a:rPr>
               <a:t>THE FORM TIME QUIZ  ·  ANSWERS  ·  QUESTION 3</a:t>
             </a:r>
@@ -8877,7 +8877,7 @@
                 <a:solidFill>
                   <a:srgbClr val="5C6552"/>
                 </a:solidFill>
-                <a:latin typeface="Karla"/>
+                <a:latin typeface="Calibri"/>
               </a:rPr>
               <a:t>A disease will kill 600 people. Told a plan “saves 200 people”, 72% chose it over a gamble. Told it means “400 people will die”, what share chose the gamble?</a:t>
             </a:r>
@@ -8915,11 +8915,11 @@
               </a:spcAft>
             </a:pPr>
             <a:r>
-              <a:rPr sz="3400" b="1" i="0">
+              <a:rPr sz="3400" b="0" i="0">
                 <a:solidFill>
                   <a:srgbClr val="2B6573"/>
                 </a:solidFill>
-                <a:latin typeface="Libre Caslon Display"/>
+                <a:latin typeface="Georgia"/>
               </a:rPr>
               <a:t>C.  78%</a:t>
             </a:r>
@@ -9051,7 +9051,7 @@
                 <a:solidFill>
                   <a:srgbClr val="2E3436"/>
                 </a:solidFill>
-                <a:latin typeface="Karla"/>
+                <a:latin typeface="Calibri"/>
               </a:rPr>
               <a:t>Only the wording changed. Talking about deaths instead of lives saved flipped most people’s choice. This is called framing.</a:t>
             </a:r>
@@ -9117,7 +9117,7 @@
                 <a:solidFill>
                   <a:srgbClr val="8B9179"/>
                 </a:solidFill>
-                <a:latin typeface="Karla"/>
+                <a:latin typeface="Calibri"/>
               </a:rPr>
               <a:t>The Pastoral Guide</a:t>
             </a:r>
@@ -9159,7 +9159,7 @@
                 <a:solidFill>
                   <a:srgbClr val="8B9179"/>
                 </a:solidFill>
-                <a:latin typeface="Karla"/>
+                <a:latin typeface="Calibri"/>
               </a:rPr>
               <a:t>17 / 27</a:t>
             </a:r>
@@ -9201,7 +9201,7 @@
                 <a:solidFill>
                   <a:srgbClr val="8B9179"/>
                 </a:solidFill>
-                <a:latin typeface="Karla"/>
+                <a:latin typeface="Calibri"/>
               </a:rPr>
               <a:t>Source: Tversky and Kahneman, Science, 1981</a:t>
             </a:r>
@@ -9305,7 +9305,7 @@
                 <a:solidFill>
                   <a:srgbClr val="2B6573"/>
                 </a:solidFill>
-                <a:latin typeface="Karla"/>
+                <a:latin typeface="Calibri"/>
               </a:rPr>
               <a:t>THE FORM TIME QUIZ  ·  ANSWERS  ·  QUESTION 4</a:t>
             </a:r>
@@ -9347,7 +9347,7 @@
                 <a:solidFill>
                   <a:srgbClr val="5C6552"/>
                 </a:solidFill>
-                <a:latin typeface="Karla"/>
+                <a:latin typeface="Calibri"/>
               </a:rPr>
               <a:t>University students guessed their final-year project would take about 34 days. On average, how long did it actually take?</a:t>
             </a:r>
@@ -9385,11 +9385,11 @@
               </a:spcAft>
             </a:pPr>
             <a:r>
-              <a:rPr sz="3400" b="1" i="0">
+              <a:rPr sz="3400" b="0" i="0">
                 <a:solidFill>
                   <a:srgbClr val="2B6573"/>
                 </a:solidFill>
-                <a:latin typeface="Libre Caslon Display"/>
+                <a:latin typeface="Georgia"/>
               </a:rPr>
               <a:t>C.  55 days</a:t>
             </a:r>
@@ -9521,7 +9521,7 @@
                 <a:solidFill>
                   <a:srgbClr val="2E3436"/>
                 </a:solidFill>
-                <a:latin typeface="Karla"/>
+                <a:latin typeface="Calibri"/>
               </a:rPr>
               <a:t>Only about three in ten finished on time, and the average was longer than even their worst-case guess of 49 days. This is the planning fallacy.</a:t>
             </a:r>
@@ -9587,7 +9587,7 @@
                 <a:solidFill>
                   <a:srgbClr val="8B9179"/>
                 </a:solidFill>
-                <a:latin typeface="Karla"/>
+                <a:latin typeface="Calibri"/>
               </a:rPr>
               <a:t>The Pastoral Guide</a:t>
             </a:r>
@@ -9629,7 +9629,7 @@
                 <a:solidFill>
                   <a:srgbClr val="8B9179"/>
                 </a:solidFill>
-                <a:latin typeface="Karla"/>
+                <a:latin typeface="Calibri"/>
               </a:rPr>
               <a:t>18 / 27</a:t>
             </a:r>
@@ -9671,7 +9671,7 @@
                 <a:solidFill>
                   <a:srgbClr val="8B9179"/>
                 </a:solidFill>
-                <a:latin typeface="Karla"/>
+                <a:latin typeface="Calibri"/>
               </a:rPr>
               <a:t>Source: Buehler, Griffin and Ross, 1994</a:t>
             </a:r>
@@ -9775,7 +9775,7 @@
                 <a:solidFill>
                   <a:srgbClr val="2B6573"/>
                 </a:solidFill>
-                <a:latin typeface="Karla"/>
+                <a:latin typeface="Calibri"/>
               </a:rPr>
               <a:t>THE FORM TIME QUIZ  ·  ANSWERS  ·  QUESTION 5</a:t>
             </a:r>
@@ -9817,7 +9817,7 @@
                 <a:solidFill>
                   <a:srgbClr val="5C6552"/>
                 </a:solidFill>
-                <a:latin typeface="Karla"/>
+                <a:latin typeface="Calibri"/>
               </a:rPr>
               <a:t>Researchers watched CCTV of 219 real arguments and fights in public in the UK, the Netherlands and South Africa. In how many did at least one bystander step in?</a:t>
             </a:r>
@@ -9855,11 +9855,11 @@
               </a:spcAft>
             </a:pPr>
             <a:r>
-              <a:rPr sz="3400" b="1" i="0">
+              <a:rPr sz="3400" b="0" i="0">
                 <a:solidFill>
                   <a:srgbClr val="2B6573"/>
                 </a:solidFill>
-                <a:latin typeface="Libre Caslon Display"/>
+                <a:latin typeface="Georgia"/>
               </a:rPr>
               <a:t>C.  About nine in ten</a:t>
             </a:r>
@@ -9991,7 +9991,7 @@
                 <a:solidFill>
                   <a:srgbClr val="2E3436"/>
                 </a:solidFill>
-                <a:latin typeface="Karla"/>
+                <a:latin typeface="Calibri"/>
               </a:rPr>
               <a:t>Someone stepped in 91% of the time, and the more people there were, the more likely it was that someone helped.</a:t>
             </a:r>
@@ -10057,7 +10057,7 @@
                 <a:solidFill>
                   <a:srgbClr val="8B9179"/>
                 </a:solidFill>
-                <a:latin typeface="Karla"/>
+                <a:latin typeface="Calibri"/>
               </a:rPr>
               <a:t>The Pastoral Guide</a:t>
             </a:r>
@@ -10099,7 +10099,7 @@
                 <a:solidFill>
                   <a:srgbClr val="8B9179"/>
                 </a:solidFill>
-                <a:latin typeface="Karla"/>
+                <a:latin typeface="Calibri"/>
               </a:rPr>
               <a:t>19 / 27</a:t>
             </a:r>
@@ -10141,7 +10141,7 @@
                 <a:solidFill>
                   <a:srgbClr val="8B9179"/>
                 </a:solidFill>
-                <a:latin typeface="Karla"/>
+                <a:latin typeface="Calibri"/>
               </a:rPr>
               <a:t>Source: Philpot et al., American Psychologist, 2019</a:t>
             </a:r>
@@ -10258,7 +10258,7 @@
                 <a:solidFill>
                   <a:srgbClr val="2B6573"/>
                 </a:solidFill>
-                <a:latin typeface="Karla"/>
+                <a:latin typeface="Calibri"/>
               </a:rPr>
               <a:t>ROUND ONE</a:t>
             </a:r>
@@ -10296,11 +10296,11 @@
               </a:spcAft>
             </a:pPr>
             <a:r>
-              <a:rPr sz="4000" b="1" i="0">
+              <a:rPr sz="4000" b="0" i="0">
                 <a:solidFill>
                   <a:srgbClr val="FFFDF7"/>
                 </a:solidFill>
-                <a:latin typeface="Libre Caslon Display"/>
+                <a:latin typeface="Georgia"/>
               </a:rPr>
               <a:t>Thinking traps</a:t>
             </a:r>
@@ -10386,7 +10386,7 @@
                 <a:solidFill>
                   <a:srgbClr val="C4DCE1"/>
                 </a:solidFill>
-                <a:latin typeface="Karla"/>
+                <a:latin typeface="Calibri"/>
               </a:rPr>
               <a:t>Six questions. Some are fact or myth, some give you options, and some you write out in full.</a:t>
             </a:r>
@@ -10452,7 +10452,7 @@
                 <a:solidFill>
                   <a:srgbClr val="C4DCE1"/>
                 </a:solidFill>
-                <a:latin typeface="Karla"/>
+                <a:latin typeface="Calibri"/>
               </a:rPr>
               <a:t>The Pastoral Guide</a:t>
             </a:r>
@@ -10494,7 +10494,7 @@
                 <a:solidFill>
                   <a:srgbClr val="C4DCE1"/>
                 </a:solidFill>
-                <a:latin typeface="Karla"/>
+                <a:latin typeface="Calibri"/>
               </a:rPr>
               <a:t>2 / 27</a:t>
             </a:r>
@@ -10598,7 +10598,7 @@
                 <a:solidFill>
                   <a:srgbClr val="2B6573"/>
                 </a:solidFill>
-                <a:latin typeface="Karla"/>
+                <a:latin typeface="Calibri"/>
               </a:rPr>
               <a:t>THE FORM TIME QUIZ  ·  ANSWERS  ·  QUESTION 6</a:t>
             </a:r>
@@ -10640,7 +10640,7 @@
                 <a:solidFill>
                   <a:srgbClr val="5C6552"/>
                 </a:solidFill>
-                <a:latin typeface="Karla"/>
+                <a:latin typeface="Calibri"/>
               </a:rPr>
               <a:t>Linda is 31, studied philosophy and cares deeply about discrimination. It is more likely that she is a bank teller and a feminist than that she is a bank teller.</a:t>
             </a:r>
@@ -10678,11 +10678,11 @@
               </a:spcAft>
             </a:pPr>
             <a:r>
-              <a:rPr sz="3400" b="1" i="0">
+              <a:rPr sz="3400" b="0" i="0">
                 <a:solidFill>
                   <a:srgbClr val="2B6573"/>
                 </a:solidFill>
-                <a:latin typeface="Libre Caslon Display"/>
+                <a:latin typeface="Georgia"/>
               </a:rPr>
               <a:t>Myth</a:t>
             </a:r>
@@ -10814,7 +10814,7 @@
                 <a:solidFill>
                   <a:srgbClr val="2E3436"/>
                 </a:solidFill>
-                <a:latin typeface="Karla"/>
+                <a:latin typeface="Calibri"/>
               </a:rPr>
               <a:t>Two things both being true can never be more likely than just one of them. Most people in the original study still picked the feminist bank teller.</a:t>
             </a:r>
@@ -10880,7 +10880,7 @@
                 <a:solidFill>
                   <a:srgbClr val="8B9179"/>
                 </a:solidFill>
-                <a:latin typeface="Karla"/>
+                <a:latin typeface="Calibri"/>
               </a:rPr>
               <a:t>The Pastoral Guide</a:t>
             </a:r>
@@ -10922,7 +10922,7 @@
                 <a:solidFill>
                   <a:srgbClr val="8B9179"/>
                 </a:solidFill>
-                <a:latin typeface="Karla"/>
+                <a:latin typeface="Calibri"/>
               </a:rPr>
               <a:t>20 / 27</a:t>
             </a:r>
@@ -10964,7 +10964,7 @@
                 <a:solidFill>
                   <a:srgbClr val="8B9179"/>
                 </a:solidFill>
-                <a:latin typeface="Karla"/>
+                <a:latin typeface="Calibri"/>
               </a:rPr>
               <a:t>Source: Tversky and Kahneman, 1983</a:t>
             </a:r>
@@ -11068,7 +11068,7 @@
                 <a:solidFill>
                   <a:srgbClr val="2B6573"/>
                 </a:solidFill>
-                <a:latin typeface="Karla"/>
+                <a:latin typeface="Calibri"/>
               </a:rPr>
               <a:t>THE FORM TIME QUIZ  ·  ANSWERS  ·  QUESTION 7</a:t>
             </a:r>
@@ -11110,7 +11110,7 @@
                 <a:solidFill>
                   <a:srgbClr val="5C6552"/>
                 </a:solidFill>
-                <a:latin typeface="Karla"/>
+                <a:latin typeface="Calibri"/>
               </a:rPr>
               <a:t>Which country’s national flag is made of two triangles, one on top of the other?</a:t>
             </a:r>
@@ -11148,11 +11148,11 @@
               </a:spcAft>
             </a:pPr>
             <a:r>
-              <a:rPr sz="3400" b="1" i="0">
+              <a:rPr sz="3400" b="0" i="0">
                 <a:solidFill>
                   <a:srgbClr val="2B6573"/>
                 </a:solidFill>
-                <a:latin typeface="Libre Caslon Display"/>
+                <a:latin typeface="Georgia"/>
               </a:rPr>
               <a:t>Nepal</a:t>
             </a:r>
@@ -11284,7 +11284,7 @@
                 <a:solidFill>
                   <a:srgbClr val="2E3436"/>
                 </a:solidFill>
-                <a:latin typeface="Karla"/>
+                <a:latin typeface="Calibri"/>
               </a:rPr>
               <a:t>It is the only national flag in the world that is not a rectangle.</a:t>
             </a:r>
@@ -11350,7 +11350,7 @@
                 <a:solidFill>
                   <a:srgbClr val="8B9179"/>
                 </a:solidFill>
-                <a:latin typeface="Karla"/>
+                <a:latin typeface="Calibri"/>
               </a:rPr>
               <a:t>The Pastoral Guide</a:t>
             </a:r>
@@ -11392,7 +11392,7 @@
                 <a:solidFill>
                   <a:srgbClr val="8B9179"/>
                 </a:solidFill>
-                <a:latin typeface="Karla"/>
+                <a:latin typeface="Calibri"/>
               </a:rPr>
               <a:t>21 / 27</a:t>
             </a:r>
@@ -11496,7 +11496,7 @@
                 <a:solidFill>
                   <a:srgbClr val="2B6573"/>
                 </a:solidFill>
-                <a:latin typeface="Karla"/>
+                <a:latin typeface="Calibri"/>
               </a:rPr>
               <a:t>THE FORM TIME QUIZ  ·  ANSWERS  ·  QUESTION 8</a:t>
             </a:r>
@@ -11538,7 +11538,7 @@
                 <a:solidFill>
                   <a:srgbClr val="5C6552"/>
                 </a:solidFill>
-                <a:latin typeface="Karla"/>
+                <a:latin typeface="Calibri"/>
               </a:rPr>
               <a:t>What is the capital city of Turkey?</a:t>
             </a:r>
@@ -11576,11 +11576,11 @@
               </a:spcAft>
             </a:pPr>
             <a:r>
-              <a:rPr sz="3400" b="1" i="0">
+              <a:rPr sz="3400" b="0" i="0">
                 <a:solidFill>
                   <a:srgbClr val="2B6573"/>
                 </a:solidFill>
-                <a:latin typeface="Libre Caslon Display"/>
+                <a:latin typeface="Georgia"/>
               </a:rPr>
               <a:t>B.  Ankara</a:t>
             </a:r>
@@ -11712,7 +11712,7 @@
                 <a:solidFill>
                   <a:srgbClr val="2E3436"/>
                 </a:solidFill>
-                <a:latin typeface="Karla"/>
+                <a:latin typeface="Calibri"/>
               </a:rPr>
               <a:t>Not Istanbul, which is bigger. Ankara became the capital in 1923.</a:t>
             </a:r>
@@ -11778,7 +11778,7 @@
                 <a:solidFill>
                   <a:srgbClr val="8B9179"/>
                 </a:solidFill>
-                <a:latin typeface="Karla"/>
+                <a:latin typeface="Calibri"/>
               </a:rPr>
               <a:t>The Pastoral Guide</a:t>
             </a:r>
@@ -11820,7 +11820,7 @@
                 <a:solidFill>
                   <a:srgbClr val="8B9179"/>
                 </a:solidFill>
-                <a:latin typeface="Karla"/>
+                <a:latin typeface="Calibri"/>
               </a:rPr>
               <a:t>22 / 27</a:t>
             </a:r>
@@ -11924,7 +11924,7 @@
                 <a:solidFill>
                   <a:srgbClr val="2B6573"/>
                 </a:solidFill>
-                <a:latin typeface="Karla"/>
+                <a:latin typeface="Calibri"/>
               </a:rPr>
               <a:t>THE FORM TIME QUIZ  ·  ANSWERS  ·  QUESTION 9</a:t>
             </a:r>
@@ -11966,7 +11966,7 @@
                 <a:solidFill>
                   <a:srgbClr val="5C6552"/>
                 </a:solidFill>
-                <a:latin typeface="Karla"/>
+                <a:latin typeface="Calibri"/>
               </a:rPr>
               <a:t>Which element has the atomic number 1?</a:t>
             </a:r>
@@ -12004,11 +12004,11 @@
               </a:spcAft>
             </a:pPr>
             <a:r>
-              <a:rPr sz="3400" b="1" i="0">
+              <a:rPr sz="3400" b="0" i="0">
                 <a:solidFill>
                   <a:srgbClr val="2B6573"/>
                 </a:solidFill>
-                <a:latin typeface="Libre Caslon Display"/>
+                <a:latin typeface="Georgia"/>
               </a:rPr>
               <a:t>Hydrogen</a:t>
             </a:r>
@@ -12140,7 +12140,7 @@
                 <a:solidFill>
                   <a:srgbClr val="2E3436"/>
                 </a:solidFill>
-                <a:latin typeface="Karla"/>
+                <a:latin typeface="Calibri"/>
               </a:rPr>
               <a:t>It is the lightest element and the most common one in the universe.</a:t>
             </a:r>
@@ -12206,7 +12206,7 @@
                 <a:solidFill>
                   <a:srgbClr val="8B9179"/>
                 </a:solidFill>
-                <a:latin typeface="Karla"/>
+                <a:latin typeface="Calibri"/>
               </a:rPr>
               <a:t>The Pastoral Guide</a:t>
             </a:r>
@@ -12248,7 +12248,7 @@
                 <a:solidFill>
                   <a:srgbClr val="8B9179"/>
                 </a:solidFill>
-                <a:latin typeface="Karla"/>
+                <a:latin typeface="Calibri"/>
               </a:rPr>
               <a:t>23 / 27</a:t>
             </a:r>
@@ -12352,7 +12352,7 @@
                 <a:solidFill>
                   <a:srgbClr val="2B6573"/>
                 </a:solidFill>
-                <a:latin typeface="Karla"/>
+                <a:latin typeface="Calibri"/>
               </a:rPr>
               <a:t>THE FORM TIME QUIZ  ·  ANSWERS  ·  QUESTION 10</a:t>
             </a:r>
@@ -12394,7 +12394,7 @@
                 <a:solidFill>
                   <a:srgbClr val="5C6552"/>
                 </a:solidFill>
-                <a:latin typeface="Karla"/>
+                <a:latin typeface="Calibri"/>
               </a:rPr>
               <a:t>What is the official language of Brazil?</a:t>
             </a:r>
@@ -12432,11 +12432,11 @@
               </a:spcAft>
             </a:pPr>
             <a:r>
-              <a:rPr sz="3400" b="1" i="0">
+              <a:rPr sz="3400" b="0" i="0">
                 <a:solidFill>
                   <a:srgbClr val="2B6573"/>
                 </a:solidFill>
-                <a:latin typeface="Libre Caslon Display"/>
+                <a:latin typeface="Georgia"/>
               </a:rPr>
               <a:t>B.  Portuguese</a:t>
             </a:r>
@@ -12568,7 +12568,7 @@
                 <a:solidFill>
                   <a:srgbClr val="2E3436"/>
                 </a:solidFill>
-                <a:latin typeface="Karla"/>
+                <a:latin typeface="Calibri"/>
               </a:rPr>
               <a:t>Brazil was ruled by Portugal for more than 300 years, so it is the only country in South America where Portuguese is the main language.</a:t>
             </a:r>
@@ -12634,7 +12634,7 @@
                 <a:solidFill>
                   <a:srgbClr val="8B9179"/>
                 </a:solidFill>
-                <a:latin typeface="Karla"/>
+                <a:latin typeface="Calibri"/>
               </a:rPr>
               <a:t>The Pastoral Guide</a:t>
             </a:r>
@@ -12676,7 +12676,7 @@
                 <a:solidFill>
                   <a:srgbClr val="8B9179"/>
                 </a:solidFill>
-                <a:latin typeface="Karla"/>
+                <a:latin typeface="Calibri"/>
               </a:rPr>
               <a:t>24 / 27</a:t>
             </a:r>
@@ -12780,7 +12780,7 @@
                 <a:solidFill>
                   <a:srgbClr val="2B6573"/>
                 </a:solidFill>
-                <a:latin typeface="Karla"/>
+                <a:latin typeface="Calibri"/>
               </a:rPr>
               <a:t>THE FORM TIME QUIZ  ·  VOLUME TWO</a:t>
             </a:r>
@@ -12842,11 +12842,11 @@
               </a:spcAft>
             </a:pPr>
             <a:r>
-              <a:rPr sz="3200" b="1" i="0">
+              <a:rPr sz="3200" b="0" i="0">
                 <a:solidFill>
                   <a:srgbClr val="2B6573"/>
                 </a:solidFill>
-                <a:latin typeface="Libre Caslon Display"/>
+                <a:latin typeface="Georgia"/>
               </a:rPr>
               <a:t>Scores back to their owners</a:t>
             </a:r>
@@ -12888,7 +12888,7 @@
                 <a:solidFill>
                   <a:srgbClr val="5C6552"/>
                 </a:solidFill>
-                <a:latin typeface="Karla"/>
+                <a:latin typeface="Calibri"/>
               </a:rPr>
               <a:t>Hands up if you got ten. Then hands up if one of the answers surprised you, and tell us which.</a:t>
             </a:r>
@@ -12930,7 +12930,7 @@
                 <a:solidFill>
                   <a:srgbClr val="8B9179"/>
                 </a:solidFill>
-                <a:latin typeface="Karla"/>
+                <a:latin typeface="Calibri"/>
               </a:rPr>
               <a:t>Volume Three is coming soon to thepastoralguide.com.</a:t>
             </a:r>
@@ -12996,7 +12996,7 @@
                 <a:solidFill>
                   <a:srgbClr val="8B9179"/>
                 </a:solidFill>
-                <a:latin typeface="Karla"/>
+                <a:latin typeface="Calibri"/>
               </a:rPr>
               <a:t>The Pastoral Guide</a:t>
             </a:r>
@@ -13038,7 +13038,7 @@
                 <a:solidFill>
                   <a:srgbClr val="8B9179"/>
                 </a:solidFill>
-                <a:latin typeface="Karla"/>
+                <a:latin typeface="Calibri"/>
               </a:rPr>
               <a:t>25 / 27</a:t>
             </a:r>
@@ -13155,7 +13155,7 @@
                 <a:solidFill>
                   <a:srgbClr val="2B6573"/>
                 </a:solidFill>
-                <a:latin typeface="Karla"/>
+                <a:latin typeface="Calibri"/>
               </a:rPr>
               <a:t>FOR THE TEACHER  ·  ADD YOUR OWN</a:t>
             </a:r>
@@ -13331,7 +13331,7 @@
                 <a:solidFill>
                   <a:srgbClr val="FFFDF7"/>
                 </a:solidFill>
-                <a:latin typeface="Karla"/>
+                <a:latin typeface="Calibri"/>
               </a:rPr>
               <a:t>?</a:t>
             </a:r>
@@ -13369,11 +13369,11 @@
               </a:spcAft>
             </a:pPr>
             <a:r>
-              <a:rPr sz="2400" b="1" i="0">
+              <a:rPr sz="2400" b="0" i="0">
                 <a:solidFill>
                   <a:srgbClr val="2B6573"/>
                 </a:solidFill>
-                <a:latin typeface="Libre Caslon Display"/>
+                <a:latin typeface="Georgia"/>
               </a:rPr>
               <a:t>[ Type your own question here ]</a:t>
             </a:r>
@@ -13415,7 +13415,7 @@
                 <a:solidFill>
                   <a:srgbClr val="5C6552"/>
                 </a:solidFill>
-                <a:latin typeface="Karla"/>
+                <a:latin typeface="Calibri"/>
               </a:rPr>
               <a:t>Add your own questions here: something from assembly, a date coming up, or a question about your own school.</a:t>
             </a:r>
@@ -13437,7 +13437,7 @@
                 <a:solidFill>
                   <a:srgbClr val="5C6552"/>
                 </a:solidFill>
-                <a:latin typeface="Karla"/>
+                <a:latin typeface="Calibri"/>
               </a:rPr>
               <a:t>Duplicate this slide for each one and drag it in after question 10. There are two spare rows on the answer sheet for them.</a:t>
             </a:r>
@@ -13503,7 +13503,7 @@
                 <a:solidFill>
                   <a:srgbClr val="8B9179"/>
                 </a:solidFill>
-                <a:latin typeface="Karla"/>
+                <a:latin typeface="Calibri"/>
               </a:rPr>
               <a:t>The Pastoral Guide</a:t>
             </a:r>
@@ -13545,7 +13545,7 @@
                 <a:solidFill>
                   <a:srgbClr val="8B9179"/>
                 </a:solidFill>
-                <a:latin typeface="Karla"/>
+                <a:latin typeface="Calibri"/>
               </a:rPr>
               <a:t>26 / 27</a:t>
             </a:r>
@@ -13662,7 +13662,7 @@
                 <a:solidFill>
                   <a:srgbClr val="2B6573"/>
                 </a:solidFill>
-                <a:latin typeface="Karla"/>
+                <a:latin typeface="Calibri"/>
               </a:rPr>
               <a:t>FOR THE TEACHER  ·  ADD YOUR OWN</a:t>
             </a:r>
@@ -13704,7 +13704,7 @@
                 <a:solidFill>
                   <a:srgbClr val="5C6552"/>
                 </a:solidFill>
-                <a:latin typeface="Karla"/>
+                <a:latin typeface="Calibri"/>
               </a:rPr>
               <a:t>[ Your question again, so the room remembers it ]</a:t>
             </a:r>
@@ -13742,11 +13742,11 @@
               </a:spcAft>
             </a:pPr>
             <a:r>
-              <a:rPr sz="3400" b="1" i="0">
+              <a:rPr sz="3400" b="0" i="0">
                 <a:solidFill>
                   <a:srgbClr val="2B6573"/>
                 </a:solidFill>
-                <a:latin typeface="Libre Caslon Display"/>
+                <a:latin typeface="Georgia"/>
               </a:rPr>
               <a:t>[ The answer ]</a:t>
             </a:r>
@@ -13878,7 +13878,7 @@
                 <a:solidFill>
                   <a:srgbClr val="2E3436"/>
                 </a:solidFill>
-                <a:latin typeface="Karla"/>
+                <a:latin typeface="Calibri"/>
               </a:rPr>
               <a:t>[ One line on why, if there is something worth knowing ]</a:t>
             </a:r>
@@ -13920,7 +13920,7 @@
                 <a:solidFill>
                   <a:srgbClr val="5C6552"/>
                 </a:solidFill>
-                <a:latin typeface="Karla"/>
+                <a:latin typeface="Calibri"/>
               </a:rPr>
               <a:t>Duplicate this slide for each of your own questions and drag it in after the answer to question 10.</a:t>
             </a:r>
@@ -13986,7 +13986,7 @@
                 <a:solidFill>
                   <a:srgbClr val="8B9179"/>
                 </a:solidFill>
-                <a:latin typeface="Karla"/>
+                <a:latin typeface="Calibri"/>
               </a:rPr>
               <a:t>The Pastoral Guide</a:t>
             </a:r>
@@ -14028,7 +14028,7 @@
                 <a:solidFill>
                   <a:srgbClr val="8B9179"/>
                 </a:solidFill>
-                <a:latin typeface="Karla"/>
+                <a:latin typeface="Calibri"/>
               </a:rPr>
               <a:t>27 / 27</a:t>
             </a:r>
@@ -14132,7 +14132,7 @@
                 <a:solidFill>
                   <a:srgbClr val="2B6573"/>
                 </a:solidFill>
-                <a:latin typeface="Karla"/>
+                <a:latin typeface="Calibri"/>
               </a:rPr>
               <a:t>THE FORM TIME QUIZ  ·  ROUND ONE  ·  QUESTION 1 OF 10</a:t>
             </a:r>
@@ -14308,7 +14308,7 @@
                 <a:solidFill>
                   <a:srgbClr val="FFFDF7"/>
                 </a:solidFill>
-                <a:latin typeface="Karla"/>
+                <a:latin typeface="Calibri"/>
               </a:rPr>
               <a:t>1</a:t>
             </a:r>
@@ -14346,11 +14346,11 @@
               </a:spcAft>
             </a:pPr>
             <a:r>
-              <a:rPr sz="2100" b="1" i="0">
+              <a:rPr sz="2100" b="0" i="0">
                 <a:solidFill>
                   <a:srgbClr val="2B6573"/>
                 </a:solidFill>
-                <a:latin typeface="Libre Caslon Display"/>
+                <a:latin typeface="Georgia"/>
               </a:rPr>
               <a:t>After seeing a random 65, people guessed a higher share of UN countries were in Africa. What is this trap called?</a:t>
             </a:r>
@@ -14436,7 +14436,7 @@
                 <a:solidFill>
                   <a:srgbClr val="8B9179"/>
                 </a:solidFill>
-                <a:latin typeface="Karla"/>
+                <a:latin typeface="Calibri"/>
               </a:rPr>
               <a:t>Agree it as a team, then write it on the sheet.</a:t>
             </a:r>
@@ -14502,7 +14502,7 @@
                 <a:solidFill>
                   <a:srgbClr val="8B9179"/>
                 </a:solidFill>
-                <a:latin typeface="Karla"/>
+                <a:latin typeface="Calibri"/>
               </a:rPr>
               <a:t>The Pastoral Guide</a:t>
             </a:r>
@@ -14544,7 +14544,7 @@
                 <a:solidFill>
                   <a:srgbClr val="8B9179"/>
                 </a:solidFill>
-                <a:latin typeface="Karla"/>
+                <a:latin typeface="Calibri"/>
               </a:rPr>
               <a:t>3 / 27</a:t>
             </a:r>
@@ -14648,7 +14648,7 @@
                 <a:solidFill>
                   <a:srgbClr val="2B6573"/>
                 </a:solidFill>
-                <a:latin typeface="Karla"/>
+                <a:latin typeface="Calibri"/>
               </a:rPr>
               <a:t>THE FORM TIME QUIZ  ·  ROUND ONE  ·  QUESTION 2 OF 10</a:t>
             </a:r>
@@ -14824,7 +14824,7 @@
                 <a:solidFill>
                   <a:srgbClr val="FFFDF7"/>
                 </a:solidFill>
-                <a:latin typeface="Karla"/>
+                <a:latin typeface="Calibri"/>
               </a:rPr>
               <a:t>2</a:t>
             </a:r>
@@ -14862,11 +14862,11 @@
               </a:spcAft>
             </a:pPr>
             <a:r>
-              <a:rPr sz="2400" b="1" i="0">
+              <a:rPr sz="2400" b="0" i="0">
                 <a:solidFill>
                   <a:srgbClr val="2B6573"/>
                 </a:solidFill>
-                <a:latin typeface="Libre Caslon Display"/>
+                <a:latin typeface="Georgia"/>
               </a:rPr>
               <a:t>In a 1985 study, most people chose a ski trip they said they would enjoy less, because it had cost more.</a:t>
             </a:r>
@@ -14908,7 +14908,7 @@
                 <a:solidFill>
                   <a:srgbClr val="8B9179"/>
                 </a:solidFill>
-                <a:latin typeface="Karla"/>
+                <a:latin typeface="Calibri"/>
               </a:rPr>
               <a:t>FACT OR MYTH?</a:t>
             </a:r>
@@ -15036,11 +15036,11 @@
               </a:spcAft>
             </a:pPr>
             <a:r>
-              <a:rPr sz="2000" b="1" i="0">
+              <a:rPr sz="2000" b="0" i="0">
                 <a:solidFill>
                   <a:srgbClr val="2B6573"/>
                 </a:solidFill>
-                <a:latin typeface="Libre Caslon Display"/>
+                <a:latin typeface="Georgia"/>
               </a:rPr>
               <a:t>Fact</a:t>
             </a:r>
@@ -15168,11 +15168,11 @@
               </a:spcAft>
             </a:pPr>
             <a:r>
-              <a:rPr sz="2000" b="1" i="0">
+              <a:rPr sz="2000" b="0" i="0">
                 <a:solidFill>
                   <a:srgbClr val="2B6573"/>
                 </a:solidFill>
-                <a:latin typeface="Libre Caslon Display"/>
+                <a:latin typeface="Georgia"/>
               </a:rPr>
               <a:t>Myth</a:t>
             </a:r>
@@ -15214,7 +15214,7 @@
                 <a:solidFill>
                   <a:srgbClr val="5C6552"/>
                 </a:solidFill>
-                <a:latin typeface="Karla"/>
+                <a:latin typeface="Calibri"/>
               </a:rPr>
               <a:t>Agree it as a team, then tick it on the sheet.</a:t>
             </a:r>
@@ -15280,7 +15280,7 @@
                 <a:solidFill>
                   <a:srgbClr val="8B9179"/>
                 </a:solidFill>
-                <a:latin typeface="Karla"/>
+                <a:latin typeface="Calibri"/>
               </a:rPr>
               <a:t>The Pastoral Guide</a:t>
             </a:r>
@@ -15322,7 +15322,7 @@
                 <a:solidFill>
                   <a:srgbClr val="8B9179"/>
                 </a:solidFill>
-                <a:latin typeface="Karla"/>
+                <a:latin typeface="Calibri"/>
               </a:rPr>
               <a:t>4 / 27</a:t>
             </a:r>
@@ -15426,7 +15426,7 @@
                 <a:solidFill>
                   <a:srgbClr val="2B6573"/>
                 </a:solidFill>
-                <a:latin typeface="Karla"/>
+                <a:latin typeface="Calibri"/>
               </a:rPr>
               <a:t>THE FORM TIME QUIZ  ·  ROUND ONE  ·  QUESTION 3 OF 10</a:t>
             </a:r>
@@ -15602,7 +15602,7 @@
                 <a:solidFill>
                   <a:srgbClr val="FFFDF7"/>
                 </a:solidFill>
-                <a:latin typeface="Karla"/>
+                <a:latin typeface="Calibri"/>
               </a:rPr>
               <a:t>3</a:t>
             </a:r>
@@ -15640,11 +15640,11 @@
               </a:spcAft>
             </a:pPr>
             <a:r>
-              <a:rPr sz="2100" b="1" i="0">
+              <a:rPr sz="2100" b="0" i="0">
                 <a:solidFill>
                   <a:srgbClr val="2B6573"/>
                 </a:solidFill>
-                <a:latin typeface="Libre Caslon Display"/>
+                <a:latin typeface="Georgia"/>
               </a:rPr>
               <a:t>A disease will kill 600 people. Told a plan “saves 200 people”, 72% chose it over a gamble. Told it means “400 people will die”, what share chose the gamble?</a:t>
             </a:r>
@@ -15686,7 +15686,7 @@
                 <a:solidFill>
                   <a:srgbClr val="8B9179"/>
                 </a:solidFill>
-                <a:latin typeface="Karla"/>
+                <a:latin typeface="Calibri"/>
               </a:rPr>
               <a:t>ONE OF THESE</a:t>
             </a:r>
@@ -15862,7 +15862,7 @@
                 <a:solidFill>
                   <a:srgbClr val="FFFDF7"/>
                 </a:solidFill>
-                <a:latin typeface="Karla"/>
+                <a:latin typeface="Calibri"/>
               </a:rPr>
               <a:t>A</a:t>
             </a:r>
@@ -15904,7 +15904,7 @@
                 <a:solidFill>
                   <a:srgbClr val="2E3436"/>
                 </a:solidFill>
-                <a:latin typeface="Karla"/>
+                <a:latin typeface="Calibri"/>
               </a:rPr>
               <a:t>22%</a:t>
             </a:r>
@@ -16080,7 +16080,7 @@
                 <a:solidFill>
                   <a:srgbClr val="FFFDF7"/>
                 </a:solidFill>
-                <a:latin typeface="Karla"/>
+                <a:latin typeface="Calibri"/>
               </a:rPr>
               <a:t>B</a:t>
             </a:r>
@@ -16122,7 +16122,7 @@
                 <a:solidFill>
                   <a:srgbClr val="2E3436"/>
                 </a:solidFill>
-                <a:latin typeface="Karla"/>
+                <a:latin typeface="Calibri"/>
               </a:rPr>
               <a:t>50%</a:t>
             </a:r>
@@ -16298,7 +16298,7 @@
                 <a:solidFill>
                   <a:srgbClr val="FFFDF7"/>
                 </a:solidFill>
-                <a:latin typeface="Karla"/>
+                <a:latin typeface="Calibri"/>
               </a:rPr>
               <a:t>C</a:t>
             </a:r>
@@ -16340,7 +16340,7 @@
                 <a:solidFill>
                   <a:srgbClr val="2E3436"/>
                 </a:solidFill>
-                <a:latin typeface="Karla"/>
+                <a:latin typeface="Calibri"/>
               </a:rPr>
               <a:t>78%</a:t>
             </a:r>
@@ -16382,7 +16382,7 @@
                 <a:solidFill>
                   <a:srgbClr val="5C6552"/>
                 </a:solidFill>
-                <a:latin typeface="Karla"/>
+                <a:latin typeface="Calibri"/>
               </a:rPr>
               <a:t>Agree it as a team, then tick it on the sheet.</a:t>
             </a:r>
@@ -16448,7 +16448,7 @@
                 <a:solidFill>
                   <a:srgbClr val="8B9179"/>
                 </a:solidFill>
-                <a:latin typeface="Karla"/>
+                <a:latin typeface="Calibri"/>
               </a:rPr>
               <a:t>The Pastoral Guide</a:t>
             </a:r>
@@ -16490,7 +16490,7 @@
                 <a:solidFill>
                   <a:srgbClr val="8B9179"/>
                 </a:solidFill>
-                <a:latin typeface="Karla"/>
+                <a:latin typeface="Calibri"/>
               </a:rPr>
               <a:t>5 / 27</a:t>
             </a:r>
@@ -16594,7 +16594,7 @@
                 <a:solidFill>
                   <a:srgbClr val="2B6573"/>
                 </a:solidFill>
-                <a:latin typeface="Karla"/>
+                <a:latin typeface="Calibri"/>
               </a:rPr>
               <a:t>THE FORM TIME QUIZ  ·  ROUND ONE  ·  QUESTION 4 OF 10</a:t>
             </a:r>
@@ -16770,7 +16770,7 @@
                 <a:solidFill>
                   <a:srgbClr val="FFFDF7"/>
                 </a:solidFill>
-                <a:latin typeface="Karla"/>
+                <a:latin typeface="Calibri"/>
               </a:rPr>
               <a:t>4</a:t>
             </a:r>
@@ -16808,11 +16808,11 @@
               </a:spcAft>
             </a:pPr>
             <a:r>
-              <a:rPr sz="2100" b="1" i="0">
+              <a:rPr sz="2100" b="0" i="0">
                 <a:solidFill>
                   <a:srgbClr val="2B6573"/>
                 </a:solidFill>
-                <a:latin typeface="Libre Caslon Display"/>
+                <a:latin typeface="Georgia"/>
               </a:rPr>
               <a:t>University students guessed their final-year project would take about 34 days. On average, how long did it actually take?</a:t>
             </a:r>
@@ -16854,7 +16854,7 @@
                 <a:solidFill>
                   <a:srgbClr val="8B9179"/>
                 </a:solidFill>
-                <a:latin typeface="Karla"/>
+                <a:latin typeface="Calibri"/>
               </a:rPr>
               <a:t>ONE OF THESE</a:t>
             </a:r>
@@ -17030,7 +17030,7 @@
                 <a:solidFill>
                   <a:srgbClr val="FFFDF7"/>
                 </a:solidFill>
-                <a:latin typeface="Karla"/>
+                <a:latin typeface="Calibri"/>
               </a:rPr>
               <a:t>A</a:t>
             </a:r>
@@ -17072,7 +17072,7 @@
                 <a:solidFill>
                   <a:srgbClr val="2E3436"/>
                 </a:solidFill>
-                <a:latin typeface="Karla"/>
+                <a:latin typeface="Calibri"/>
               </a:rPr>
               <a:t>27 days</a:t>
             </a:r>
@@ -17248,7 +17248,7 @@
                 <a:solidFill>
                   <a:srgbClr val="FFFDF7"/>
                 </a:solidFill>
-                <a:latin typeface="Karla"/>
+                <a:latin typeface="Calibri"/>
               </a:rPr>
               <a:t>B</a:t>
             </a:r>
@@ -17290,7 +17290,7 @@
                 <a:solidFill>
                   <a:srgbClr val="2E3436"/>
                 </a:solidFill>
-                <a:latin typeface="Karla"/>
+                <a:latin typeface="Calibri"/>
               </a:rPr>
               <a:t>40 days</a:t>
             </a:r>
@@ -17466,7 +17466,7 @@
                 <a:solidFill>
                   <a:srgbClr val="FFFDF7"/>
                 </a:solidFill>
-                <a:latin typeface="Karla"/>
+                <a:latin typeface="Calibri"/>
               </a:rPr>
               <a:t>C</a:t>
             </a:r>
@@ -17508,7 +17508,7 @@
                 <a:solidFill>
                   <a:srgbClr val="2E3436"/>
                 </a:solidFill>
-                <a:latin typeface="Karla"/>
+                <a:latin typeface="Calibri"/>
               </a:rPr>
               <a:t>55 days</a:t>
             </a:r>
@@ -17550,7 +17550,7 @@
                 <a:solidFill>
                   <a:srgbClr val="5C6552"/>
                 </a:solidFill>
-                <a:latin typeface="Karla"/>
+                <a:latin typeface="Calibri"/>
               </a:rPr>
               <a:t>Agree it as a team, then tick it on the sheet.</a:t>
             </a:r>
@@ -17616,7 +17616,7 @@
                 <a:solidFill>
                   <a:srgbClr val="8B9179"/>
                 </a:solidFill>
-                <a:latin typeface="Karla"/>
+                <a:latin typeface="Calibri"/>
               </a:rPr>
               <a:t>The Pastoral Guide</a:t>
             </a:r>
@@ -17658,7 +17658,7 @@
                 <a:solidFill>
                   <a:srgbClr val="8B9179"/>
                 </a:solidFill>
-                <a:latin typeface="Karla"/>
+                <a:latin typeface="Calibri"/>
               </a:rPr>
               <a:t>6 / 27</a:t>
             </a:r>
@@ -17762,7 +17762,7 @@
                 <a:solidFill>
                   <a:srgbClr val="2B6573"/>
                 </a:solidFill>
-                <a:latin typeface="Karla"/>
+                <a:latin typeface="Calibri"/>
               </a:rPr>
               <a:t>THE FORM TIME QUIZ  ·  ROUND ONE  ·  QUESTION 5 OF 10</a:t>
             </a:r>
@@ -17938,7 +17938,7 @@
                 <a:solidFill>
                   <a:srgbClr val="FFFDF7"/>
                 </a:solidFill>
-                <a:latin typeface="Karla"/>
+                <a:latin typeface="Calibri"/>
               </a:rPr>
               <a:t>5</a:t>
             </a:r>
@@ -17976,11 +17976,11 @@
               </a:spcAft>
             </a:pPr>
             <a:r>
-              <a:rPr sz="2100" b="1" i="0">
+              <a:rPr sz="2100" b="0" i="0">
                 <a:solidFill>
                   <a:srgbClr val="2B6573"/>
                 </a:solidFill>
-                <a:latin typeface="Libre Caslon Display"/>
+                <a:latin typeface="Georgia"/>
               </a:rPr>
               <a:t>Researchers watched CCTV of 219 real arguments and fights in public in the UK, the Netherlands and South Africa. In how many did at least one bystander step in?</a:t>
             </a:r>
@@ -18022,7 +18022,7 @@
                 <a:solidFill>
                   <a:srgbClr val="8B9179"/>
                 </a:solidFill>
-                <a:latin typeface="Karla"/>
+                <a:latin typeface="Calibri"/>
               </a:rPr>
               <a:t>ONE OF THESE</a:t>
             </a:r>
@@ -18198,7 +18198,7 @@
                 <a:solidFill>
                   <a:srgbClr val="FFFDF7"/>
                 </a:solidFill>
-                <a:latin typeface="Karla"/>
+                <a:latin typeface="Calibri"/>
               </a:rPr>
               <a:t>A</a:t>
             </a:r>
@@ -18240,7 +18240,7 @@
                 <a:solidFill>
                   <a:srgbClr val="2E3436"/>
                 </a:solidFill>
-                <a:latin typeface="Karla"/>
+                <a:latin typeface="Calibri"/>
               </a:rPr>
               <a:t>About one in ten</a:t>
             </a:r>
@@ -18416,7 +18416,7 @@
                 <a:solidFill>
                   <a:srgbClr val="FFFDF7"/>
                 </a:solidFill>
-                <a:latin typeface="Karla"/>
+                <a:latin typeface="Calibri"/>
               </a:rPr>
               <a:t>B</a:t>
             </a:r>
@@ -18458,7 +18458,7 @@
                 <a:solidFill>
                   <a:srgbClr val="2E3436"/>
                 </a:solidFill>
-                <a:latin typeface="Karla"/>
+                <a:latin typeface="Calibri"/>
               </a:rPr>
               <a:t>About half</a:t>
             </a:r>
@@ -18634,7 +18634,7 @@
                 <a:solidFill>
                   <a:srgbClr val="FFFDF7"/>
                 </a:solidFill>
-                <a:latin typeface="Karla"/>
+                <a:latin typeface="Calibri"/>
               </a:rPr>
               <a:t>C</a:t>
             </a:r>
@@ -18676,7 +18676,7 @@
                 <a:solidFill>
                   <a:srgbClr val="2E3436"/>
                 </a:solidFill>
-                <a:latin typeface="Karla"/>
+                <a:latin typeface="Calibri"/>
               </a:rPr>
               <a:t>About nine in ten</a:t>
             </a:r>
@@ -18718,7 +18718,7 @@
                 <a:solidFill>
                   <a:srgbClr val="5C6552"/>
                 </a:solidFill>
-                <a:latin typeface="Karla"/>
+                <a:latin typeface="Calibri"/>
               </a:rPr>
               <a:t>Agree it as a team, then tick it on the sheet.</a:t>
             </a:r>
@@ -18784,7 +18784,7 @@
                 <a:solidFill>
                   <a:srgbClr val="8B9179"/>
                 </a:solidFill>
-                <a:latin typeface="Karla"/>
+                <a:latin typeface="Calibri"/>
               </a:rPr>
               <a:t>The Pastoral Guide</a:t>
             </a:r>
@@ -18826,7 +18826,7 @@
                 <a:solidFill>
                   <a:srgbClr val="8B9179"/>
                 </a:solidFill>
-                <a:latin typeface="Karla"/>
+                <a:latin typeface="Calibri"/>
               </a:rPr>
               <a:t>7 / 27</a:t>
             </a:r>
@@ -18930,7 +18930,7 @@
                 <a:solidFill>
                   <a:srgbClr val="2B6573"/>
                 </a:solidFill>
-                <a:latin typeface="Karla"/>
+                <a:latin typeface="Calibri"/>
               </a:rPr>
               <a:t>THE FORM TIME QUIZ  ·  ROUND ONE  ·  QUESTION 6 OF 10</a:t>
             </a:r>
@@ -19106,7 +19106,7 @@
                 <a:solidFill>
                   <a:srgbClr val="FFFDF7"/>
                 </a:solidFill>
-                <a:latin typeface="Karla"/>
+                <a:latin typeface="Calibri"/>
               </a:rPr>
               <a:t>6</a:t>
             </a:r>
@@ -19144,11 +19144,11 @@
               </a:spcAft>
             </a:pPr>
             <a:r>
-              <a:rPr sz="2100" b="1" i="0">
+              <a:rPr sz="2100" b="0" i="0">
                 <a:solidFill>
                   <a:srgbClr val="2B6573"/>
                 </a:solidFill>
-                <a:latin typeface="Libre Caslon Display"/>
+                <a:latin typeface="Georgia"/>
               </a:rPr>
               <a:t>Linda is 31, studied philosophy and cares deeply about discrimination. It is more likely that she is a bank teller and a feminist than that she is a bank teller.</a:t>
             </a:r>
@@ -19190,7 +19190,7 @@
                 <a:solidFill>
                   <a:srgbClr val="8B9179"/>
                 </a:solidFill>
-                <a:latin typeface="Karla"/>
+                <a:latin typeface="Calibri"/>
               </a:rPr>
               <a:t>FACT OR MYTH?</a:t>
             </a:r>
@@ -19318,11 +19318,11 @@
               </a:spcAft>
             </a:pPr>
             <a:r>
-              <a:rPr sz="2000" b="1" i="0">
+              <a:rPr sz="2000" b="0" i="0">
                 <a:solidFill>
                   <a:srgbClr val="2B6573"/>
                 </a:solidFill>
-                <a:latin typeface="Libre Caslon Display"/>
+                <a:latin typeface="Georgia"/>
               </a:rPr>
               <a:t>Fact</a:t>
             </a:r>
@@ -19450,11 +19450,11 @@
               </a:spcAft>
             </a:pPr>
             <a:r>
-              <a:rPr sz="2000" b="1" i="0">
+              <a:rPr sz="2000" b="0" i="0">
                 <a:solidFill>
                   <a:srgbClr val="2B6573"/>
                 </a:solidFill>
-                <a:latin typeface="Libre Caslon Display"/>
+                <a:latin typeface="Georgia"/>
               </a:rPr>
               <a:t>Myth</a:t>
             </a:r>
@@ -19496,7 +19496,7 @@
                 <a:solidFill>
                   <a:srgbClr val="5C6552"/>
                 </a:solidFill>
-                <a:latin typeface="Karla"/>
+                <a:latin typeface="Calibri"/>
               </a:rPr>
               <a:t>Agree it as a team, then tick it on the sheet.</a:t>
             </a:r>
@@ -19562,7 +19562,7 @@
                 <a:solidFill>
                   <a:srgbClr val="8B9179"/>
                 </a:solidFill>
-                <a:latin typeface="Karla"/>
+                <a:latin typeface="Calibri"/>
               </a:rPr>
               <a:t>The Pastoral Guide</a:t>
             </a:r>
@@ -19604,7 +19604,7 @@
                 <a:solidFill>
                   <a:srgbClr val="8B9179"/>
                 </a:solidFill>
-                <a:latin typeface="Karla"/>
+                <a:latin typeface="Calibri"/>
               </a:rPr>
               <a:t>8 / 27</a:t>
             </a:r>
@@ -19721,7 +19721,7 @@
                 <a:solidFill>
                   <a:srgbClr val="2B6573"/>
                 </a:solidFill>
-                <a:latin typeface="Karla"/>
+                <a:latin typeface="Calibri"/>
               </a:rPr>
               <a:t>ROUND TWO</a:t>
             </a:r>
@@ -19759,11 +19759,11 @@
               </a:spcAft>
             </a:pPr>
             <a:r>
-              <a:rPr sz="4000" b="1" i="0">
+              <a:rPr sz="4000" b="0" i="0">
                 <a:solidFill>
                   <a:srgbClr val="FFFDF7"/>
                 </a:solidFill>
-                <a:latin typeface="Libre Caslon Display"/>
+                <a:latin typeface="Georgia"/>
               </a:rPr>
               <a:t>General knowledge</a:t>
             </a:r>
@@ -19849,7 +19849,7 @@
                 <a:solidFill>
                   <a:srgbClr val="C4DCE1"/>
                 </a:solidFill>
-                <a:latin typeface="Karla"/>
+                <a:latin typeface="Calibri"/>
               </a:rPr>
               <a:t>Four questions to finish. Some have options, and some you write out in full.</a:t>
             </a:r>
@@ -19915,7 +19915,7 @@
                 <a:solidFill>
                   <a:srgbClr val="C4DCE1"/>
                 </a:solidFill>
-                <a:latin typeface="Karla"/>
+                <a:latin typeface="Calibri"/>
               </a:rPr>
               <a:t>The Pastoral Guide</a:t>
             </a:r>
@@ -19957,7 +19957,7 @@
                 <a:solidFill>
                   <a:srgbClr val="C4DCE1"/>
                 </a:solidFill>
-                <a:latin typeface="Karla"/>
+                <a:latin typeface="Calibri"/>
               </a:rPr>
               <a:t>9 / 27</a:t>
             </a:r>
